--- a/class/cloud_infra_mgmt/00주차_VM환경구성/01_강의자료/0주차_VM환경구성_배포용.pptx
+++ b/class/cloud_infra_mgmt/00주차_VM환경구성/01_강의자료/0주차_VM환경구성_배포용.pptx
@@ -20,6 +20,7 @@
     <p:sldId id="268" r:id="rId19"/>
     <p:sldId id="269" r:id="rId20"/>
     <p:sldId id="270" r:id="rId21"/>
+    <p:sldId id="271" r:id="rId22"/>
   </p:sldIdLst>
   <p:sldSz cx="12191695" cy="6858000" type="screen4x3"/>
   <p:notesSz cx="6858000" cy="9144000"/>
@@ -3845,7 +3846,7 @@
                 </a:solidFill>
                 <a:latin typeface="맑은 고딕"/>
               </a:rPr>
-              <a:t>10 / 15</a:t>
+              <a:t>10 / 16</a:t>
             </a:r>
           </a:p>
         </p:txBody>
@@ -4540,7 +4541,7 @@
                 </a:solidFill>
                 <a:latin typeface="맑은 고딕"/>
               </a:rPr>
-              <a:t>12 / 15</a:t>
+              <a:t>12 / 16</a:t>
             </a:r>
           </a:p>
         </p:txBody>
@@ -4778,7 +4779,7 @@
                 </a:solidFill>
                 <a:latin typeface="맑은 고딕"/>
               </a:rPr>
-              <a:t>질의응답</a:t>
+              <a:t>PART 4 · 학기 중 필요한 계정</a:t>
             </a:r>
           </a:p>
         </p:txBody>
@@ -4813,7 +4814,7 @@
                 </a:solidFill>
                 <a:latin typeface="맑은 고딕"/>
               </a:rPr>
-              <a:t>자주 발생하는 문제와 해결</a:t>
+              <a:t>학기 중 이런 계정을 만들게 됩니다</a:t>
             </a:r>
           </a:p>
         </p:txBody>
@@ -4826,8 +4827,8 @@
         </p:nvSpPr>
         <p:spPr>
           <a:xfrm>
-            <a:off x="640080" y="1508760"/>
-            <a:ext cx="10881360" cy="4297680"/>
+            <a:off x="640080" y="1463040"/>
+            <a:ext cx="10881360" cy="3291840"/>
           </a:xfrm>
           <a:prstGeom prst="rect">
             <a:avLst/>
@@ -4846,7 +4847,7 @@
               </a:lnSpc>
             </a:pPr>
             <a:r>
-              <a:rPr sz="1800" b="1">
+              <a:rPr sz="1500" b="1">
                 <a:solidFill>
                   <a:srgbClr val="0D9488"/>
                 </a:solidFill>
@@ -4855,13 +4856,13 @@
               <a:t>●  </a:t>
             </a:r>
             <a:r>
-              <a:rPr sz="1800" b="0">
+              <a:rPr sz="1500" b="0">
                 <a:solidFill>
                   <a:srgbClr val="222733"/>
                 </a:solidFill>
                 <a:latin typeface="맑은 고딕"/>
               </a:rPr>
-              <a:t>VM이 켜지지 않는다 → BIOS에서 가상화(Intel VT-x/AMD-V) 옵션이 켜져 있는지 확인</a:t>
+              <a:t>GitHub — 3주차 2차시에 가입 (소스 코드 저장용, 9~13주차까지 계속 재사용)</a:t>
             </a:r>
           </a:p>
           <a:p>
@@ -4871,7 +4872,7 @@
               </a:lnSpc>
             </a:pPr>
             <a:r>
-              <a:rPr sz="1800" b="1">
+              <a:rPr sz="1500" b="1">
                 <a:solidFill>
                   <a:srgbClr val="0D9488"/>
                 </a:solidFill>
@@ -4880,13 +4881,13 @@
               <a:t>●  </a:t>
             </a:r>
             <a:r>
-              <a:rPr sz="1800" b="0">
+              <a:rPr sz="1500" b="0">
                 <a:solidFill>
                   <a:srgbClr val="222733"/>
                 </a:solidFill>
                 <a:latin typeface="맑은 고딕"/>
               </a:rPr>
-              <a:t>로그인이 안 된다 → 아이디/비밀번호는 student / a1234로 통일되어 있음</a:t>
+              <a:t>Docker Hub — 3주차 2차시에 가입 (이미지 push/pull용, 13주차 파이프라인에서도 재사용)</a:t>
             </a:r>
           </a:p>
           <a:p>
@@ -4896,7 +4897,7 @@
               </a:lnSpc>
             </a:pPr>
             <a:r>
-              <a:rPr sz="1800" b="1">
+              <a:rPr sz="1500" b="1">
                 <a:solidFill>
                   <a:srgbClr val="0D9488"/>
                 </a:solidFill>
@@ -4905,27 +4906,71 @@
               <a:t>●  </a:t>
             </a:r>
             <a:r>
-              <a:rPr sz="1800" b="0">
+              <a:rPr sz="1500" b="0">
                 <a:solidFill>
                   <a:srgbClr val="222733"/>
                 </a:solidFill>
                 <a:latin typeface="맑은 고딕"/>
               </a:rPr>
-              <a:t>그 외 문제 → LMS Q&amp;A 게시판에 캡처와 함께 남겨주세요</a:t>
-            </a:r>
-          </a:p>
-        </p:txBody>
-      </p:sp>
-      <p:sp>
-        <p:nvSpPr>
-          <p:cNvPr id="8" name="TextBox 7"/>
+              <a:t>Terraform Cloud — 10주차 2차시에 가입 (원격 State 관리용, GitHub 계정으로 가입하면 편함)</a:t>
+            </a:r>
+          </a:p>
+        </p:txBody>
+      </p:sp>
+      <p:sp>
+        <p:nvSpPr>
+          <p:cNvPr id="8" name="Rectangle 7"/>
+          <p:cNvSpPr/>
+          <p:nvPr/>
+        </p:nvSpPr>
+        <p:spPr>
+          <a:xfrm>
+            <a:off x="640080" y="5074920"/>
+            <a:ext cx="10881360" cy="1143000"/>
+          </a:xfrm>
+          <a:prstGeom prst="rect">
+            <a:avLst/>
+          </a:prstGeom>
+          <a:solidFill>
+            <a:srgbClr val="0D9488"/>
+          </a:solidFill>
+          <a:ln>
+            <a:noFill/>
+          </a:ln>
+          <a:effectLst/>
+        </p:spPr>
+        <p:style>
+          <a:lnRef idx="1">
+            <a:schemeClr val="accent1"/>
+          </a:lnRef>
+          <a:fillRef idx="3">
+            <a:schemeClr val="accent1"/>
+          </a:fillRef>
+          <a:effectRef idx="2">
+            <a:schemeClr val="accent1"/>
+          </a:effectRef>
+          <a:fontRef idx="minor">
+            <a:schemeClr val="lt1"/>
+          </a:fontRef>
+        </p:style>
+        <p:txBody>
+          <a:bodyPr rtlCol="0" anchor="ctr"/>
+          <a:lstStyle/>
+          <a:p>
+            <a:pPr algn="ctr"/>
+          </a:p>
+        </p:txBody>
+      </p:sp>
+      <p:sp>
+        <p:nvSpPr>
+          <p:cNvPr id="9" name="TextBox 8"/>
           <p:cNvSpPr txBox="1"/>
           <p:nvPr/>
         </p:nvSpPr>
         <p:spPr>
           <a:xfrm>
-            <a:off x="457200" y="6528816"/>
-            <a:ext cx="7315200" cy="274320"/>
+            <a:off x="914400" y="5193792"/>
+            <a:ext cx="10332720" cy="365760"/>
           </a:xfrm>
           <a:prstGeom prst="rect">
             <a:avLst/>
@@ -4940,27 +4985,27 @@
           <a:p>
             <a:pPr algn="l"/>
             <a:r>
-              <a:rPr sz="900" b="0">
-                <a:solidFill>
-                  <a:srgbClr val="5B6373"/>
-                </a:solidFill>
-                <a:latin typeface="맑은 고딕"/>
-              </a:rPr>
-              <a:t>클라우드인프라관리  ·  0주차 오리엔테이션</a:t>
-            </a:r>
-          </a:p>
-        </p:txBody>
-      </p:sp>
-      <p:sp>
-        <p:nvSpPr>
-          <p:cNvPr id="9" name="TextBox 8"/>
+              <a:rPr sz="1500" b="1">
+                <a:solidFill>
+                  <a:srgbClr val="FFFFFF"/>
+                </a:solidFill>
+                <a:latin typeface="맑은 고딕"/>
+              </a:rPr>
+              <a:t>💡  미리 알아두면 좋은 것</a:t>
+            </a:r>
+          </a:p>
+        </p:txBody>
+      </p:sp>
+      <p:sp>
+        <p:nvSpPr>
+          <p:cNvPr id="10" name="TextBox 9"/>
           <p:cNvSpPr txBox="1"/>
           <p:nvPr/>
         </p:nvSpPr>
         <p:spPr>
           <a:xfrm>
-            <a:off x="10607040" y="6528816"/>
-            <a:ext cx="1188720" cy="274320"/>
+            <a:off x="914400" y="5577840"/>
+            <a:ext cx="10332720" cy="548640"/>
           </a:xfrm>
           <a:prstGeom prst="rect">
             <a:avLst/>
@@ -4975,20 +5020,90 @@
           <a:p>
             <a:pPr algn="l"/>
             <a:r>
+              <a:rPr sz="1300" b="0">
+                <a:solidFill>
+                  <a:srgbClr val="FFFFFF"/>
+                </a:solidFill>
+                <a:latin typeface="맑은 고딕"/>
+              </a:rPr>
+              <a:t>세 서비스를 동일한 이메일로 가입해두면 관리가 편합니다. Killercoda는 가입이 필요 없습니다 — 매 차시 제공되는 링크만 클릭하면 바로 실습할 수 있습니다.</a:t>
+            </a:r>
+          </a:p>
+        </p:txBody>
+      </p:sp>
+      <p:sp>
+        <p:nvSpPr>
+          <p:cNvPr id="11" name="TextBox 10"/>
+          <p:cNvSpPr txBox="1"/>
+          <p:nvPr/>
+        </p:nvSpPr>
+        <p:spPr>
+          <a:xfrm>
+            <a:off x="457200" y="6528816"/>
+            <a:ext cx="7315200" cy="274320"/>
+          </a:xfrm>
+          <a:prstGeom prst="rect">
+            <a:avLst/>
+          </a:prstGeom>
+          <a:noFill/>
+        </p:spPr>
+        <p:txBody>
+          <a:bodyPr wrap="square">
+            <a:spAutoFit/>
+          </a:bodyPr>
+          <a:lstStyle/>
+          <a:p>
+            <a:pPr algn="l"/>
+            <a:r>
               <a:rPr sz="900" b="0">
                 <a:solidFill>
                   <a:srgbClr val="5B6373"/>
                 </a:solidFill>
                 <a:latin typeface="맑은 고딕"/>
               </a:rPr>
-              <a:t>13 / 15</a:t>
-            </a:r>
-          </a:p>
-        </p:txBody>
-      </p:sp>
-      <p:sp>
-        <p:nvSpPr>
-          <p:cNvPr id="10" name="Rectangle 9"/>
+              <a:t>클라우드인프라관리  ·  0주차 오리엔테이션</a:t>
+            </a:r>
+          </a:p>
+        </p:txBody>
+      </p:sp>
+      <p:sp>
+        <p:nvSpPr>
+          <p:cNvPr id="12" name="TextBox 11"/>
+          <p:cNvSpPr txBox="1"/>
+          <p:nvPr/>
+        </p:nvSpPr>
+        <p:spPr>
+          <a:xfrm>
+            <a:off x="10607040" y="6528816"/>
+            <a:ext cx="1188720" cy="274320"/>
+          </a:xfrm>
+          <a:prstGeom prst="rect">
+            <a:avLst/>
+          </a:prstGeom>
+          <a:noFill/>
+        </p:spPr>
+        <p:txBody>
+          <a:bodyPr wrap="square">
+            <a:spAutoFit/>
+          </a:bodyPr>
+          <a:lstStyle/>
+          <a:p>
+            <a:pPr algn="l"/>
+            <a:r>
+              <a:rPr sz="900" b="0">
+                <a:solidFill>
+                  <a:srgbClr val="5B6373"/>
+                </a:solidFill>
+                <a:latin typeface="맑은 고딕"/>
+              </a:rPr>
+              <a:t>13 / 16</a:t>
+            </a:r>
+          </a:p>
+        </p:txBody>
+      </p:sp>
+      <p:sp>
+        <p:nvSpPr>
+          <p:cNvPr id="13" name="Rectangle 12"/>
           <p:cNvSpPr/>
           <p:nvPr/>
         </p:nvSpPr>
@@ -5057,7 +5172,7 @@
         <p:spPr>
           <a:xfrm>
             <a:off x="0" y="0"/>
-            <a:ext cx="12191695" cy="6858000"/>
+            <a:ext cx="12191695" cy="1051560"/>
           </a:xfrm>
           <a:prstGeom prst="rect">
             <a:avLst/>
@@ -5100,8 +5215,8 @@
         </p:nvSpPr>
         <p:spPr>
           <a:xfrm>
-            <a:off x="0" y="0"/>
-            <a:ext cx="164592" cy="6858000"/>
+            <a:off x="0" y="1051560"/>
+            <a:ext cx="12191695" cy="36576"/>
           </a:xfrm>
           <a:prstGeom prst="rect">
             <a:avLst/>
@@ -5138,49 +5253,14 @@
       </p:sp>
       <p:sp>
         <p:nvSpPr>
-          <p:cNvPr id="4" name="TextBox 3"/>
-          <p:cNvSpPr txBox="1"/>
-          <p:nvPr/>
-        </p:nvSpPr>
-        <p:spPr>
-          <a:xfrm>
-            <a:off x="822960" y="640080"/>
-            <a:ext cx="10058400" cy="548640"/>
-          </a:xfrm>
-          <a:prstGeom prst="rect">
-            <a:avLst/>
-          </a:prstGeom>
-          <a:noFill/>
-        </p:spPr>
-        <p:txBody>
-          <a:bodyPr wrap="square">
-            <a:spAutoFit/>
-          </a:bodyPr>
-          <a:lstStyle/>
-          <a:p>
-            <a:pPr algn="l"/>
-            <a:r>
-              <a:rPr sz="2800" b="1">
-                <a:solidFill>
-                  <a:srgbClr val="FFFFFF"/>
-                </a:solidFill>
-                <a:latin typeface="맑은 고딕"/>
-              </a:rPr>
-              <a:t>오늘의 정리</a:t>
-            </a:r>
-          </a:p>
-        </p:txBody>
-      </p:sp>
-      <p:sp>
-        <p:nvSpPr>
-          <p:cNvPr id="5" name="Rectangle 4"/>
+          <p:cNvPr id="4" name="Rectangle 3"/>
           <p:cNvSpPr/>
           <p:nvPr/>
         </p:nvSpPr>
         <p:spPr>
           <a:xfrm>
-            <a:off x="822960" y="1645920"/>
-            <a:ext cx="457200" cy="457200"/>
+            <a:off x="457200" y="256032"/>
+            <a:ext cx="777240" cy="548640"/>
           </a:xfrm>
           <a:prstGeom prst="rect">
             <a:avLst/>
@@ -5219,21 +5299,21 @@
                 </a:solidFill>
                 <a:latin typeface="맑은 고딕"/>
               </a:rPr>
-              <a:t>1</a:t>
-            </a:r>
-          </a:p>
-        </p:txBody>
-      </p:sp>
-      <p:sp>
-        <p:nvSpPr>
-          <p:cNvPr id="6" name="TextBox 5"/>
+              <a:t>05</a:t>
+            </a:r>
+          </a:p>
+        </p:txBody>
+      </p:sp>
+      <p:sp>
+        <p:nvSpPr>
+          <p:cNvPr id="5" name="TextBox 4"/>
           <p:cNvSpPr txBox="1"/>
           <p:nvPr/>
         </p:nvSpPr>
         <p:spPr>
           <a:xfrm>
-            <a:off x="1463040" y="1691640"/>
-            <a:ext cx="9601200" cy="548640"/>
+            <a:off x="1417320" y="146304"/>
+            <a:ext cx="10241280" cy="365760"/>
           </a:xfrm>
           <a:prstGeom prst="rect">
             <a:avLst/>
@@ -5248,33 +5328,236 @@
           <a:p>
             <a:pPr algn="l"/>
             <a:r>
+              <a:rPr sz="1200" b="1">
+                <a:solidFill>
+                  <a:srgbClr val="14B8A6"/>
+                </a:solidFill>
+                <a:latin typeface="맑은 고딕"/>
+              </a:rPr>
+              <a:t>질의응답</a:t>
+            </a:r>
+          </a:p>
+        </p:txBody>
+      </p:sp>
+      <p:sp>
+        <p:nvSpPr>
+          <p:cNvPr id="6" name="TextBox 5"/>
+          <p:cNvSpPr txBox="1"/>
+          <p:nvPr/>
+        </p:nvSpPr>
+        <p:spPr>
+          <a:xfrm>
+            <a:off x="1417320" y="457200"/>
+            <a:ext cx="10241280" cy="548640"/>
+          </a:xfrm>
+          <a:prstGeom prst="rect">
+            <a:avLst/>
+          </a:prstGeom>
+          <a:noFill/>
+        </p:spPr>
+        <p:txBody>
+          <a:bodyPr wrap="square">
+            <a:spAutoFit/>
+          </a:bodyPr>
+          <a:lstStyle/>
+          <a:p>
+            <a:pPr algn="l"/>
+            <a:r>
+              <a:rPr sz="2500" b="1">
+                <a:solidFill>
+                  <a:srgbClr val="FFFFFF"/>
+                </a:solidFill>
+                <a:latin typeface="맑은 고딕"/>
+              </a:rPr>
+              <a:t>자주 발생하는 문제와 해결</a:t>
+            </a:r>
+          </a:p>
+        </p:txBody>
+      </p:sp>
+      <p:sp>
+        <p:nvSpPr>
+          <p:cNvPr id="7" name="TextBox 6"/>
+          <p:cNvSpPr txBox="1"/>
+          <p:nvPr/>
+        </p:nvSpPr>
+        <p:spPr>
+          <a:xfrm>
+            <a:off x="640080" y="1508760"/>
+            <a:ext cx="10881360" cy="4297680"/>
+          </a:xfrm>
+          <a:prstGeom prst="rect">
+            <a:avLst/>
+          </a:prstGeom>
+          <a:noFill/>
+        </p:spPr>
+        <p:txBody>
+          <a:bodyPr wrap="square">
+            <a:spAutoFit/>
+          </a:bodyPr>
+          <a:lstStyle/>
+          <a:p>
+            <a:pPr>
+              <a:lnSpc>
+                <a:spcPct val="115000"/>
+              </a:lnSpc>
+            </a:pPr>
+            <a:r>
               <a:rPr sz="1800" b="1">
                 <a:solidFill>
-                  <a:srgbClr val="FFFFFF"/>
-                </a:solidFill>
-                <a:latin typeface="맑은 고딕"/>
-              </a:rPr>
-              <a:t>이 VM 하나로 0주차부터 7주차까지 모든 실습을 진행한다</a:t>
-            </a:r>
-          </a:p>
-        </p:txBody>
-      </p:sp>
-      <p:sp>
-        <p:nvSpPr>
-          <p:cNvPr id="7" name="Rectangle 6"/>
+                  <a:srgbClr val="0D9488"/>
+                </a:solidFill>
+                <a:latin typeface="맑은 고딕"/>
+              </a:rPr>
+              <a:t>●  </a:t>
+            </a:r>
+            <a:r>
+              <a:rPr sz="1800" b="0">
+                <a:solidFill>
+                  <a:srgbClr val="222733"/>
+                </a:solidFill>
+                <a:latin typeface="맑은 고딕"/>
+              </a:rPr>
+              <a:t>VM이 켜지지 않는다 → BIOS에서 가상화(Intel VT-x/AMD-V) 옵션이 켜져 있는지 확인</a:t>
+            </a:r>
+          </a:p>
+          <a:p>
+            <a:pPr>
+              <a:lnSpc>
+                <a:spcPct val="115000"/>
+              </a:lnSpc>
+            </a:pPr>
+            <a:r>
+              <a:rPr sz="1800" b="1">
+                <a:solidFill>
+                  <a:srgbClr val="0D9488"/>
+                </a:solidFill>
+                <a:latin typeface="맑은 고딕"/>
+              </a:rPr>
+              <a:t>●  </a:t>
+            </a:r>
+            <a:r>
+              <a:rPr sz="1800" b="0">
+                <a:solidFill>
+                  <a:srgbClr val="222733"/>
+                </a:solidFill>
+                <a:latin typeface="맑은 고딕"/>
+              </a:rPr>
+              <a:t>로그인이 안 된다 → 아이디/비밀번호는 student / a1234로 통일되어 있음</a:t>
+            </a:r>
+          </a:p>
+          <a:p>
+            <a:pPr>
+              <a:lnSpc>
+                <a:spcPct val="115000"/>
+              </a:lnSpc>
+            </a:pPr>
+            <a:r>
+              <a:rPr sz="1800" b="1">
+                <a:solidFill>
+                  <a:srgbClr val="0D9488"/>
+                </a:solidFill>
+                <a:latin typeface="맑은 고딕"/>
+              </a:rPr>
+              <a:t>●  </a:t>
+            </a:r>
+            <a:r>
+              <a:rPr sz="1800" b="0">
+                <a:solidFill>
+                  <a:srgbClr val="222733"/>
+                </a:solidFill>
+                <a:latin typeface="맑은 고딕"/>
+              </a:rPr>
+              <a:t>그 외 문제 → LMS Q&amp;A 게시판에 캡처와 함께 남겨주세요</a:t>
+            </a:r>
+          </a:p>
+        </p:txBody>
+      </p:sp>
+      <p:sp>
+        <p:nvSpPr>
+          <p:cNvPr id="8" name="TextBox 7"/>
+          <p:cNvSpPr txBox="1"/>
+          <p:nvPr/>
+        </p:nvSpPr>
+        <p:spPr>
+          <a:xfrm>
+            <a:off x="457200" y="6528816"/>
+            <a:ext cx="7315200" cy="274320"/>
+          </a:xfrm>
+          <a:prstGeom prst="rect">
+            <a:avLst/>
+          </a:prstGeom>
+          <a:noFill/>
+        </p:spPr>
+        <p:txBody>
+          <a:bodyPr wrap="square">
+            <a:spAutoFit/>
+          </a:bodyPr>
+          <a:lstStyle/>
+          <a:p>
+            <a:pPr algn="l"/>
+            <a:r>
+              <a:rPr sz="900" b="0">
+                <a:solidFill>
+                  <a:srgbClr val="5B6373"/>
+                </a:solidFill>
+                <a:latin typeface="맑은 고딕"/>
+              </a:rPr>
+              <a:t>클라우드인프라관리  ·  0주차 오리엔테이션</a:t>
+            </a:r>
+          </a:p>
+        </p:txBody>
+      </p:sp>
+      <p:sp>
+        <p:nvSpPr>
+          <p:cNvPr id="9" name="TextBox 8"/>
+          <p:cNvSpPr txBox="1"/>
+          <p:nvPr/>
+        </p:nvSpPr>
+        <p:spPr>
+          <a:xfrm>
+            <a:off x="10607040" y="6528816"/>
+            <a:ext cx="1188720" cy="274320"/>
+          </a:xfrm>
+          <a:prstGeom prst="rect">
+            <a:avLst/>
+          </a:prstGeom>
+          <a:noFill/>
+        </p:spPr>
+        <p:txBody>
+          <a:bodyPr wrap="square">
+            <a:spAutoFit/>
+          </a:bodyPr>
+          <a:lstStyle/>
+          <a:p>
+            <a:pPr algn="l"/>
+            <a:r>
+              <a:rPr sz="900" b="0">
+                <a:solidFill>
+                  <a:srgbClr val="5B6373"/>
+                </a:solidFill>
+                <a:latin typeface="맑은 고딕"/>
+              </a:rPr>
+              <a:t>14 / 16</a:t>
+            </a:r>
+          </a:p>
+        </p:txBody>
+      </p:sp>
+      <p:sp>
+        <p:nvSpPr>
+          <p:cNvPr id="10" name="Rectangle 9"/>
           <p:cNvSpPr/>
           <p:nvPr/>
         </p:nvSpPr>
         <p:spPr>
           <a:xfrm>
-            <a:off x="822960" y="2423160"/>
-            <a:ext cx="457200" cy="457200"/>
+            <a:off x="457200" y="6473952"/>
+            <a:ext cx="11274552" cy="9144"/>
           </a:xfrm>
           <a:prstGeom prst="rect">
             <a:avLst/>
           </a:prstGeom>
           <a:solidFill>
-            <a:srgbClr val="14B8A6"/>
+            <a:srgbClr val="E3E7EE"/>
           </a:solidFill>
           <a:ln>
             <a:noFill/>
@@ -5296,54 +5579,10 @@
           </a:fontRef>
         </p:style>
         <p:txBody>
-          <a:bodyPr rtlCol="0" anchor="ctr" wrap="square"/>
+          <a:bodyPr rtlCol="0" anchor="ctr"/>
           <a:lstStyle/>
           <a:p>
             <a:pPr algn="ctr"/>
-            <a:r>
-              <a:rPr sz="1600" b="1">
-                <a:solidFill>
-                  <a:srgbClr val="14213D"/>
-                </a:solidFill>
-                <a:latin typeface="맑은 고딕"/>
-              </a:rPr>
-              <a:t>2</a:t>
-            </a:r>
-          </a:p>
-        </p:txBody>
-      </p:sp>
-      <p:sp>
-        <p:nvSpPr>
-          <p:cNvPr id="8" name="TextBox 7"/>
-          <p:cNvSpPr txBox="1"/>
-          <p:nvPr/>
-        </p:nvSpPr>
-        <p:spPr>
-          <a:xfrm>
-            <a:off x="1463040" y="2468879"/>
-            <a:ext cx="9601200" cy="548640"/>
-          </a:xfrm>
-          <a:prstGeom prst="rect">
-            <a:avLst/>
-          </a:prstGeom>
-          <a:noFill/>
-        </p:spPr>
-        <p:txBody>
-          <a:bodyPr wrap="square">
-            <a:spAutoFit/>
-          </a:bodyPr>
-          <a:lstStyle/>
-          <a:p>
-            <a:pPr algn="l"/>
-            <a:r>
-              <a:rPr sz="1800" b="1">
-                <a:solidFill>
-                  <a:srgbClr val="FFFFFF"/>
-                </a:solidFill>
-                <a:latin typeface="맑은 고딕"/>
-              </a:rPr>
-              <a:t>docker --version / kubectl version --client / minikube status 세 명령어로 준비 상태를 확인한다</a:t>
-            </a:r>
           </a:p>
         </p:txBody>
       </p:sp>
@@ -5483,6 +5722,323 @@
                 </a:solidFill>
                 <a:latin typeface="맑은 고딕"/>
               </a:rPr>
+              <a:t>오늘의 정리</a:t>
+            </a:r>
+          </a:p>
+        </p:txBody>
+      </p:sp>
+      <p:sp>
+        <p:nvSpPr>
+          <p:cNvPr id="5" name="Rectangle 4"/>
+          <p:cNvSpPr/>
+          <p:nvPr/>
+        </p:nvSpPr>
+        <p:spPr>
+          <a:xfrm>
+            <a:off x="822960" y="1645920"/>
+            <a:ext cx="457200" cy="457200"/>
+          </a:xfrm>
+          <a:prstGeom prst="rect">
+            <a:avLst/>
+          </a:prstGeom>
+          <a:solidFill>
+            <a:srgbClr val="14B8A6"/>
+          </a:solidFill>
+          <a:ln>
+            <a:noFill/>
+          </a:ln>
+          <a:effectLst/>
+        </p:spPr>
+        <p:style>
+          <a:lnRef idx="1">
+            <a:schemeClr val="accent1"/>
+          </a:lnRef>
+          <a:fillRef idx="3">
+            <a:schemeClr val="accent1"/>
+          </a:fillRef>
+          <a:effectRef idx="2">
+            <a:schemeClr val="accent1"/>
+          </a:effectRef>
+          <a:fontRef idx="minor">
+            <a:schemeClr val="lt1"/>
+          </a:fontRef>
+        </p:style>
+        <p:txBody>
+          <a:bodyPr rtlCol="0" anchor="ctr" wrap="square"/>
+          <a:lstStyle/>
+          <a:p>
+            <a:pPr algn="ctr"/>
+            <a:r>
+              <a:rPr sz="1600" b="1">
+                <a:solidFill>
+                  <a:srgbClr val="14213D"/>
+                </a:solidFill>
+                <a:latin typeface="맑은 고딕"/>
+              </a:rPr>
+              <a:t>1</a:t>
+            </a:r>
+          </a:p>
+        </p:txBody>
+      </p:sp>
+      <p:sp>
+        <p:nvSpPr>
+          <p:cNvPr id="6" name="TextBox 5"/>
+          <p:cNvSpPr txBox="1"/>
+          <p:nvPr/>
+        </p:nvSpPr>
+        <p:spPr>
+          <a:xfrm>
+            <a:off x="1463040" y="1691640"/>
+            <a:ext cx="9601200" cy="548640"/>
+          </a:xfrm>
+          <a:prstGeom prst="rect">
+            <a:avLst/>
+          </a:prstGeom>
+          <a:noFill/>
+        </p:spPr>
+        <p:txBody>
+          <a:bodyPr wrap="square">
+            <a:spAutoFit/>
+          </a:bodyPr>
+          <a:lstStyle/>
+          <a:p>
+            <a:pPr algn="l"/>
+            <a:r>
+              <a:rPr sz="1800" b="1">
+                <a:solidFill>
+                  <a:srgbClr val="FFFFFF"/>
+                </a:solidFill>
+                <a:latin typeface="맑은 고딕"/>
+              </a:rPr>
+              <a:t>이 VM 하나로 0주차부터 7주차까지 모든 실습을 진행한다</a:t>
+            </a:r>
+          </a:p>
+        </p:txBody>
+      </p:sp>
+      <p:sp>
+        <p:nvSpPr>
+          <p:cNvPr id="7" name="Rectangle 6"/>
+          <p:cNvSpPr/>
+          <p:nvPr/>
+        </p:nvSpPr>
+        <p:spPr>
+          <a:xfrm>
+            <a:off x="822960" y="2423160"/>
+            <a:ext cx="457200" cy="457200"/>
+          </a:xfrm>
+          <a:prstGeom prst="rect">
+            <a:avLst/>
+          </a:prstGeom>
+          <a:solidFill>
+            <a:srgbClr val="14B8A6"/>
+          </a:solidFill>
+          <a:ln>
+            <a:noFill/>
+          </a:ln>
+          <a:effectLst/>
+        </p:spPr>
+        <p:style>
+          <a:lnRef idx="1">
+            <a:schemeClr val="accent1"/>
+          </a:lnRef>
+          <a:fillRef idx="3">
+            <a:schemeClr val="accent1"/>
+          </a:fillRef>
+          <a:effectRef idx="2">
+            <a:schemeClr val="accent1"/>
+          </a:effectRef>
+          <a:fontRef idx="minor">
+            <a:schemeClr val="lt1"/>
+          </a:fontRef>
+        </p:style>
+        <p:txBody>
+          <a:bodyPr rtlCol="0" anchor="ctr" wrap="square"/>
+          <a:lstStyle/>
+          <a:p>
+            <a:pPr algn="ctr"/>
+            <a:r>
+              <a:rPr sz="1600" b="1">
+                <a:solidFill>
+                  <a:srgbClr val="14213D"/>
+                </a:solidFill>
+                <a:latin typeface="맑은 고딕"/>
+              </a:rPr>
+              <a:t>2</a:t>
+            </a:r>
+          </a:p>
+        </p:txBody>
+      </p:sp>
+      <p:sp>
+        <p:nvSpPr>
+          <p:cNvPr id="8" name="TextBox 7"/>
+          <p:cNvSpPr txBox="1"/>
+          <p:nvPr/>
+        </p:nvSpPr>
+        <p:spPr>
+          <a:xfrm>
+            <a:off x="1463040" y="2468879"/>
+            <a:ext cx="9601200" cy="548640"/>
+          </a:xfrm>
+          <a:prstGeom prst="rect">
+            <a:avLst/>
+          </a:prstGeom>
+          <a:noFill/>
+        </p:spPr>
+        <p:txBody>
+          <a:bodyPr wrap="square">
+            <a:spAutoFit/>
+          </a:bodyPr>
+          <a:lstStyle/>
+          <a:p>
+            <a:pPr algn="l"/>
+            <a:r>
+              <a:rPr sz="1800" b="1">
+                <a:solidFill>
+                  <a:srgbClr val="FFFFFF"/>
+                </a:solidFill>
+                <a:latin typeface="맑은 고딕"/>
+              </a:rPr>
+              <a:t>docker --version / kubectl version --client / minikube status 세 명령어로 준비 상태를 확인한다</a:t>
+            </a:r>
+          </a:p>
+        </p:txBody>
+      </p:sp>
+    </p:spTree>
+  </p:cSld>
+  <p:clrMapOvr>
+    <a:masterClrMapping/>
+  </p:clrMapOvr>
+</p:sld>
+</file>
+
+<file path=ppt/slides/slide16.xml><?xml version="1.0" encoding="utf-8"?>
+<p:sld xmlns:a="http://schemas.openxmlformats.org/drawingml/2006/main" xmlns:p="http://schemas.openxmlformats.org/presentationml/2006/main" xmlns:r="http://schemas.openxmlformats.org/officeDocument/2006/relationships">
+  <p:cSld>
+    <p:spTree>
+      <p:nvGrpSpPr>
+        <p:cNvPr id="1" name=""/>
+        <p:cNvGrpSpPr/>
+        <p:nvPr/>
+      </p:nvGrpSpPr>
+      <p:grpSpPr/>
+      <p:sp>
+        <p:nvSpPr>
+          <p:cNvPr id="2" name="Rectangle 1"/>
+          <p:cNvSpPr/>
+          <p:nvPr/>
+        </p:nvSpPr>
+        <p:spPr>
+          <a:xfrm>
+            <a:off x="0" y="0"/>
+            <a:ext cx="12191695" cy="6858000"/>
+          </a:xfrm>
+          <a:prstGeom prst="rect">
+            <a:avLst/>
+          </a:prstGeom>
+          <a:solidFill>
+            <a:srgbClr val="14213D"/>
+          </a:solidFill>
+          <a:ln>
+            <a:noFill/>
+          </a:ln>
+          <a:effectLst/>
+        </p:spPr>
+        <p:style>
+          <a:lnRef idx="1">
+            <a:schemeClr val="accent1"/>
+          </a:lnRef>
+          <a:fillRef idx="3">
+            <a:schemeClr val="accent1"/>
+          </a:fillRef>
+          <a:effectRef idx="2">
+            <a:schemeClr val="accent1"/>
+          </a:effectRef>
+          <a:fontRef idx="minor">
+            <a:schemeClr val="lt1"/>
+          </a:fontRef>
+        </p:style>
+        <p:txBody>
+          <a:bodyPr rtlCol="0" anchor="ctr"/>
+          <a:lstStyle/>
+          <a:p>
+            <a:pPr algn="ctr"/>
+          </a:p>
+        </p:txBody>
+      </p:sp>
+      <p:sp>
+        <p:nvSpPr>
+          <p:cNvPr id="3" name="Rectangle 2"/>
+          <p:cNvSpPr/>
+          <p:nvPr/>
+        </p:nvSpPr>
+        <p:spPr>
+          <a:xfrm>
+            <a:off x="0" y="0"/>
+            <a:ext cx="164592" cy="6858000"/>
+          </a:xfrm>
+          <a:prstGeom prst="rect">
+            <a:avLst/>
+          </a:prstGeom>
+          <a:solidFill>
+            <a:srgbClr val="14B8A6"/>
+          </a:solidFill>
+          <a:ln>
+            <a:noFill/>
+          </a:ln>
+          <a:effectLst/>
+        </p:spPr>
+        <p:style>
+          <a:lnRef idx="1">
+            <a:schemeClr val="accent1"/>
+          </a:lnRef>
+          <a:fillRef idx="3">
+            <a:schemeClr val="accent1"/>
+          </a:fillRef>
+          <a:effectRef idx="2">
+            <a:schemeClr val="accent1"/>
+          </a:effectRef>
+          <a:fontRef idx="minor">
+            <a:schemeClr val="lt1"/>
+          </a:fontRef>
+        </p:style>
+        <p:txBody>
+          <a:bodyPr rtlCol="0" anchor="ctr"/>
+          <a:lstStyle/>
+          <a:p>
+            <a:pPr algn="ctr"/>
+          </a:p>
+        </p:txBody>
+      </p:sp>
+      <p:sp>
+        <p:nvSpPr>
+          <p:cNvPr id="4" name="TextBox 3"/>
+          <p:cNvSpPr txBox="1"/>
+          <p:nvPr/>
+        </p:nvSpPr>
+        <p:spPr>
+          <a:xfrm>
+            <a:off x="822960" y="640080"/>
+            <a:ext cx="10058400" cy="548640"/>
+          </a:xfrm>
+          <a:prstGeom prst="rect">
+            <a:avLst/>
+          </a:prstGeom>
+          <a:noFill/>
+        </p:spPr>
+        <p:txBody>
+          <a:bodyPr wrap="square">
+            <a:spAutoFit/>
+          </a:bodyPr>
+          <a:lstStyle/>
+          <a:p>
+            <a:pPr algn="l"/>
+            <a:r>
+              <a:rPr sz="2800" b="1">
+                <a:solidFill>
+                  <a:srgbClr val="FFFFFF"/>
+                </a:solidFill>
+                <a:latin typeface="맑은 고딕"/>
+              </a:rPr>
               <a:t>다음 주 예고</a:t>
             </a:r>
           </a:p>
@@ -5762,7 +6318,7 @@
               </a:lnSpc>
             </a:pPr>
             <a:r>
-              <a:rPr sz="2000" b="1">
+              <a:rPr sz="1900" b="1">
                 <a:solidFill>
                   <a:srgbClr val="0D9488"/>
                 </a:solidFill>
@@ -5771,7 +6327,7 @@
               <a:t>●  </a:t>
             </a:r>
             <a:r>
-              <a:rPr sz="2000" b="0">
+              <a:rPr sz="1900" b="0">
                 <a:solidFill>
                   <a:srgbClr val="222733"/>
                 </a:solidFill>
@@ -5787,7 +6343,7 @@
               </a:lnSpc>
             </a:pPr>
             <a:r>
-              <a:rPr sz="2000" b="1">
+              <a:rPr sz="1900" b="1">
                 <a:solidFill>
                   <a:srgbClr val="0D9488"/>
                 </a:solidFill>
@@ -5796,7 +6352,7 @@
               <a:t>●  </a:t>
             </a:r>
             <a:r>
-              <a:rPr sz="2000" b="0">
+              <a:rPr sz="1900" b="0">
                 <a:solidFill>
                   <a:srgbClr val="222733"/>
                 </a:solidFill>
@@ -5812,7 +6368,7 @@
               </a:lnSpc>
             </a:pPr>
             <a:r>
-              <a:rPr sz="2000" b="1">
+              <a:rPr sz="1900" b="1">
                 <a:solidFill>
                   <a:srgbClr val="0D9488"/>
                 </a:solidFill>
@@ -5821,13 +6377,38 @@
               <a:t>●  </a:t>
             </a:r>
             <a:r>
-              <a:rPr sz="2000" b="0">
+              <a:rPr sz="1900" b="0">
                 <a:solidFill>
                   <a:srgbClr val="222733"/>
                 </a:solidFill>
                 <a:latin typeface="맑은 고딕"/>
               </a:rPr>
               <a:t>3.  VM에 로그인하고 실습 환경이 정상인지 직접 확인한다</a:t>
+            </a:r>
+          </a:p>
+          <a:p>
+            <a:pPr>
+              <a:lnSpc>
+                <a:spcPct val="115000"/>
+              </a:lnSpc>
+            </a:pPr>
+            <a:r>
+              <a:rPr sz="1900" b="1">
+                <a:solidFill>
+                  <a:srgbClr val="0D9488"/>
+                </a:solidFill>
+                <a:latin typeface="맑은 고딕"/>
+              </a:rPr>
+              <a:t>●  </a:t>
+            </a:r>
+            <a:r>
+              <a:rPr sz="1900" b="0">
+                <a:solidFill>
+                  <a:srgbClr val="222733"/>
+                </a:solidFill>
+                <a:latin typeface="맑은 고딕"/>
+              </a:rPr>
+              <a:t>4.  학기 중 어떤 계정을 언제 만들게 되는지 미리 파악한다</a:t>
             </a:r>
           </a:p>
         </p:txBody>
@@ -5897,7 +6478,7 @@
                 </a:solidFill>
                 <a:latin typeface="맑은 고딕"/>
               </a:rPr>
-              <a:t>02 / 15</a:t>
+              <a:t>02 / 16</a:t>
             </a:r>
           </a:p>
         </p:txBody>
@@ -6516,7 +7097,7 @@
                 </a:solidFill>
                 <a:latin typeface="맑은 고딕"/>
               </a:rPr>
-              <a:t>20분</a:t>
+              <a:t>15분</a:t>
             </a:r>
           </a:p>
         </p:txBody>
@@ -6755,7 +7336,7 @@
                 </a:solidFill>
                 <a:latin typeface="맑은 고딕"/>
               </a:rPr>
-              <a:t>10분</a:t>
+              <a:t>15분</a:t>
             </a:r>
           </a:p>
         </p:txBody>
@@ -6790,7 +7371,7 @@
                 </a:solidFill>
                 <a:latin typeface="맑은 고딕"/>
               </a:rPr>
-              <a:t>docker/kubectl/minikube 확인</a:t>
+              <a:t>환경 확인 + 학기 계정 안내</a:t>
             </a:r>
           </a:p>
         </p:txBody>
@@ -7099,7 +7680,7 @@
                 </a:solidFill>
                 <a:latin typeface="맑은 고딕"/>
               </a:rPr>
-              <a:t>03 / 15</a:t>
+              <a:t>03 / 16</a:t>
             </a:r>
           </a:p>
         </p:txBody>
@@ -7883,7 +8464,7 @@
                 </a:solidFill>
                 <a:latin typeface="맑은 고딕"/>
               </a:rPr>
-              <a:t>05 / 15</a:t>
+              <a:t>05 / 16</a:t>
             </a:r>
           </a:p>
         </p:txBody>
@@ -9016,7 +9597,7 @@
                 </a:solidFill>
                 <a:latin typeface="맑은 고딕"/>
               </a:rPr>
-              <a:t>06 / 15</a:t>
+              <a:t>06 / 16</a:t>
             </a:r>
           </a:p>
         </p:txBody>
@@ -9686,7 +10267,7 @@
                 </a:solidFill>
                 <a:latin typeface="맑은 고딕"/>
               </a:rPr>
-              <a:t>08 / 15</a:t>
+              <a:t>08 / 16</a:t>
             </a:r>
           </a:p>
         </p:txBody>
@@ -10607,7 +11188,7 @@
                 </a:solidFill>
                 <a:latin typeface="맑은 고딕"/>
               </a:rPr>
-              <a:t>09 / 15</a:t>
+              <a:t>09 / 16</a:t>
             </a:r>
           </a:p>
         </p:txBody>

--- a/class/cloud_infra_mgmt/00주차_VM환경구성/01_강의자료/0주차_VM환경구성_배포용.pptx
+++ b/class/cloud_infra_mgmt/00주차_VM환경구성/01_강의자료/0주차_VM환경구성_배포용.pptx
@@ -6318,15 +6318,6 @@
               </a:lnSpc>
             </a:pPr>
             <a:r>
-              <a:rPr sz="1900" b="1">
-                <a:solidFill>
-                  <a:srgbClr val="0D9488"/>
-                </a:solidFill>
-                <a:latin typeface="맑은 고딕"/>
-              </a:rPr>
-              <a:t>●  </a:t>
-            </a:r>
-            <a:r>
               <a:rPr sz="1900" b="0">
                 <a:solidFill>
                   <a:srgbClr val="222733"/>
@@ -6343,15 +6334,6 @@
               </a:lnSpc>
             </a:pPr>
             <a:r>
-              <a:rPr sz="1900" b="1">
-                <a:solidFill>
-                  <a:srgbClr val="0D9488"/>
-                </a:solidFill>
-                <a:latin typeface="맑은 고딕"/>
-              </a:rPr>
-              <a:t>●  </a:t>
-            </a:r>
-            <a:r>
               <a:rPr sz="1900" b="0">
                 <a:solidFill>
                   <a:srgbClr val="222733"/>
@@ -6368,15 +6350,6 @@
               </a:lnSpc>
             </a:pPr>
             <a:r>
-              <a:rPr sz="1900" b="1">
-                <a:solidFill>
-                  <a:srgbClr val="0D9488"/>
-                </a:solidFill>
-                <a:latin typeface="맑은 고딕"/>
-              </a:rPr>
-              <a:t>●  </a:t>
-            </a:r>
-            <a:r>
               <a:rPr sz="1900" b="0">
                 <a:solidFill>
                   <a:srgbClr val="222733"/>
@@ -6392,15 +6365,6 @@
                 <a:spcPct val="115000"/>
               </a:lnSpc>
             </a:pPr>
-            <a:r>
-              <a:rPr sz="1900" b="1">
-                <a:solidFill>
-                  <a:srgbClr val="0D9488"/>
-                </a:solidFill>
-                <a:latin typeface="맑은 고딕"/>
-              </a:rPr>
-              <a:t>●  </a:t>
-            </a:r>
             <a:r>
               <a:rPr sz="1900" b="0">
                 <a:solidFill>
@@ -6711,54 +6675,8 @@
         </p:nvSpPr>
         <p:spPr>
           <a:xfrm>
-            <a:off x="1177747" y="1828800"/>
-            <a:ext cx="2048256" cy="3108960"/>
-          </a:xfrm>
-          <a:prstGeom prst="rect">
-            <a:avLst/>
-          </a:prstGeom>
-          <a:solidFill>
-            <a:srgbClr val="FFFFFF"/>
-          </a:solidFill>
-          <a:ln>
-            <a:solidFill>
-              <a:srgbClr val="FFFFFF"/>
-            </a:solidFill>
-          </a:ln>
-          <a:effectLst/>
-        </p:spPr>
-        <p:style>
-          <a:lnRef idx="1">
-            <a:schemeClr val="accent1"/>
-          </a:lnRef>
-          <a:fillRef idx="3">
-            <a:schemeClr val="accent1"/>
-          </a:fillRef>
-          <a:effectRef idx="2">
-            <a:schemeClr val="accent1"/>
-          </a:effectRef>
-          <a:fontRef idx="minor">
-            <a:schemeClr val="lt1"/>
-          </a:fontRef>
-        </p:style>
-        <p:txBody>
-          <a:bodyPr rtlCol="0" anchor="ctr"/>
-          <a:lstStyle/>
-          <a:p>
-            <a:pPr algn="ctr"/>
-          </a:p>
-        </p:txBody>
-      </p:sp>
-      <p:sp>
-        <p:nvSpPr>
-          <p:cNvPr id="7" name="Rectangle 6"/>
-          <p:cNvSpPr/>
-          <p:nvPr/>
-        </p:nvSpPr>
-        <p:spPr>
-          <a:xfrm>
-            <a:off x="1177747" y="1828800"/>
-            <a:ext cx="2048256" cy="109728"/>
+            <a:off x="2571292" y="1730959"/>
+            <a:ext cx="1995220" cy="31089"/>
           </a:xfrm>
           <a:prstGeom prst="rect">
             <a:avLst/>
@@ -6795,121 +6713,16 @@
       </p:sp>
       <p:sp>
         <p:nvSpPr>
-          <p:cNvPr id="8" name="TextBox 7"/>
-          <p:cNvSpPr txBox="1"/>
-          <p:nvPr/>
-        </p:nvSpPr>
-        <p:spPr>
-          <a:xfrm>
-            <a:off x="1314907" y="2148840"/>
-            <a:ext cx="1773936" cy="640080"/>
-          </a:xfrm>
-          <a:prstGeom prst="rect">
-            <a:avLst/>
-          </a:prstGeom>
-          <a:noFill/>
-        </p:spPr>
-        <p:txBody>
-          <a:bodyPr wrap="square">
-            <a:spAutoFit/>
-          </a:bodyPr>
-          <a:lstStyle/>
-          <a:p>
-            <a:pPr algn="l"/>
-            <a:r>
-              <a:rPr sz="1500" b="1">
-                <a:solidFill>
-                  <a:srgbClr val="14213D"/>
-                </a:solidFill>
-                <a:latin typeface="맑은 고딕"/>
-              </a:rPr>
-              <a:t>① 배경 설명</a:t>
-            </a:r>
-          </a:p>
-        </p:txBody>
-      </p:sp>
-      <p:sp>
-        <p:nvSpPr>
-          <p:cNvPr id="9" name="TextBox 8"/>
-          <p:cNvSpPr txBox="1"/>
-          <p:nvPr/>
-        </p:nvSpPr>
-        <p:spPr>
-          <a:xfrm>
-            <a:off x="1314907" y="2834640"/>
-            <a:ext cx="1773936" cy="548640"/>
-          </a:xfrm>
-          <a:prstGeom prst="rect">
-            <a:avLst/>
-          </a:prstGeom>
-          <a:noFill/>
-        </p:spPr>
-        <p:txBody>
-          <a:bodyPr wrap="square">
-            <a:spAutoFit/>
-          </a:bodyPr>
-          <a:lstStyle/>
-          <a:p>
-            <a:pPr algn="l"/>
-            <a:r>
-              <a:rPr sz="1300" b="0">
-                <a:solidFill>
-                  <a:srgbClr val="0D9488"/>
-                </a:solidFill>
-                <a:latin typeface="맑은 고딕"/>
-              </a:rPr>
-              <a:t>10분</a:t>
-            </a:r>
-          </a:p>
-        </p:txBody>
-      </p:sp>
-      <p:sp>
-        <p:nvSpPr>
-          <p:cNvPr id="10" name="TextBox 9"/>
-          <p:cNvSpPr txBox="1"/>
-          <p:nvPr/>
-        </p:nvSpPr>
-        <p:spPr>
-          <a:xfrm>
-            <a:off x="1314907" y="3566160"/>
-            <a:ext cx="1773936" cy="1188720"/>
-          </a:xfrm>
-          <a:prstGeom prst="rect">
-            <a:avLst/>
-          </a:prstGeom>
-          <a:noFill/>
-        </p:spPr>
-        <p:txBody>
-          <a:bodyPr wrap="square">
-            <a:spAutoFit/>
-          </a:bodyPr>
-          <a:lstStyle/>
-          <a:p>
-            <a:pPr algn="l"/>
-            <a:r>
-              <a:rPr sz="1200" b="0">
-                <a:solidFill>
-                  <a:srgbClr val="222733"/>
-                </a:solidFill>
-                <a:latin typeface="맑은 고딕"/>
-              </a:rPr>
-              <a:t>왜 VM을 통째로 주는가</a:t>
-            </a:r>
-          </a:p>
-        </p:txBody>
-      </p:sp>
-      <p:sp>
-        <p:nvSpPr>
-          <p:cNvPr id="11" name="Rectangle 10"/>
+          <p:cNvPr id="7" name="Isosceles Triangle 6"/>
           <p:cNvSpPr/>
           <p:nvPr/>
         </p:nvSpPr>
         <p:spPr>
-          <a:xfrm>
-            <a:off x="3430828" y="3273552"/>
-            <a:ext cx="128016" cy="219456"/>
-          </a:xfrm>
-          <a:prstGeom prst="rect">
+          <a:xfrm rot="5400000">
+            <a:off x="3495751" y="1673352"/>
+            <a:ext cx="146304" cy="146304"/>
+          </a:xfrm>
+          <a:prstGeom prst="triangle">
             <a:avLst/>
           </a:prstGeom>
           <a:solidFill>
@@ -6944,60 +6757,14 @@
       </p:sp>
       <p:sp>
         <p:nvSpPr>
-          <p:cNvPr id="12" name="Rectangle 11"/>
+          <p:cNvPr id="8" name="Rectangle 7"/>
           <p:cNvSpPr/>
           <p:nvPr/>
         </p:nvSpPr>
         <p:spPr>
           <a:xfrm>
-            <a:off x="3763670" y="1828800"/>
-            <a:ext cx="2048256" cy="3108960"/>
-          </a:xfrm>
-          <a:prstGeom prst="rect">
-            <a:avLst/>
-          </a:prstGeom>
-          <a:solidFill>
-            <a:srgbClr val="FFFFFF"/>
-          </a:solidFill>
-          <a:ln>
-            <a:solidFill>
-              <a:srgbClr val="FFFFFF"/>
-            </a:solidFill>
-          </a:ln>
-          <a:effectLst/>
-        </p:spPr>
-        <p:style>
-          <a:lnRef idx="1">
-            <a:schemeClr val="accent1"/>
-          </a:lnRef>
-          <a:fillRef idx="3">
-            <a:schemeClr val="accent1"/>
-          </a:fillRef>
-          <a:effectRef idx="2">
-            <a:schemeClr val="accent1"/>
-          </a:effectRef>
-          <a:fontRef idx="minor">
-            <a:schemeClr val="lt1"/>
-          </a:fontRef>
-        </p:style>
-        <p:txBody>
-          <a:bodyPr rtlCol="0" anchor="ctr"/>
-          <a:lstStyle/>
-          <a:p>
-            <a:pPr algn="ctr"/>
-          </a:p>
-        </p:txBody>
-      </p:sp>
-      <p:sp>
-        <p:nvSpPr>
-          <p:cNvPr id="13" name="Rectangle 12"/>
-          <p:cNvSpPr/>
-          <p:nvPr/>
-        </p:nvSpPr>
-        <p:spPr>
-          <a:xfrm>
-            <a:off x="3763670" y="1828800"/>
-            <a:ext cx="2048256" cy="109728"/>
+            <a:off x="5096865" y="1730959"/>
+            <a:ext cx="1995220" cy="31089"/>
           </a:xfrm>
           <a:prstGeom prst="rect">
             <a:avLst/>
@@ -7034,121 +6801,16 @@
       </p:sp>
       <p:sp>
         <p:nvSpPr>
-          <p:cNvPr id="14" name="TextBox 13"/>
-          <p:cNvSpPr txBox="1"/>
-          <p:nvPr/>
-        </p:nvSpPr>
-        <p:spPr>
-          <a:xfrm>
-            <a:off x="3900830" y="2148840"/>
-            <a:ext cx="1773936" cy="640080"/>
-          </a:xfrm>
-          <a:prstGeom prst="rect">
-            <a:avLst/>
-          </a:prstGeom>
-          <a:noFill/>
-        </p:spPr>
-        <p:txBody>
-          <a:bodyPr wrap="square">
-            <a:spAutoFit/>
-          </a:bodyPr>
-          <a:lstStyle/>
-          <a:p>
-            <a:pPr algn="l"/>
-            <a:r>
-              <a:rPr sz="1500" b="1">
-                <a:solidFill>
-                  <a:srgbClr val="14213D"/>
-                </a:solidFill>
-                <a:latin typeface="맑은 고딕"/>
-              </a:rPr>
-              <a:t>② 설치 실습</a:t>
-            </a:r>
-          </a:p>
-        </p:txBody>
-      </p:sp>
-      <p:sp>
-        <p:nvSpPr>
-          <p:cNvPr id="15" name="TextBox 14"/>
-          <p:cNvSpPr txBox="1"/>
-          <p:nvPr/>
-        </p:nvSpPr>
-        <p:spPr>
-          <a:xfrm>
-            <a:off x="3900830" y="2834640"/>
-            <a:ext cx="1773936" cy="548640"/>
-          </a:xfrm>
-          <a:prstGeom prst="rect">
-            <a:avLst/>
-          </a:prstGeom>
-          <a:noFill/>
-        </p:spPr>
-        <p:txBody>
-          <a:bodyPr wrap="square">
-            <a:spAutoFit/>
-          </a:bodyPr>
-          <a:lstStyle/>
-          <a:p>
-            <a:pPr algn="l"/>
-            <a:r>
-              <a:rPr sz="1300" b="0">
-                <a:solidFill>
-                  <a:srgbClr val="0D9488"/>
-                </a:solidFill>
-                <a:latin typeface="맑은 고딕"/>
-              </a:rPr>
-              <a:t>15분</a:t>
-            </a:r>
-          </a:p>
-        </p:txBody>
-      </p:sp>
-      <p:sp>
-        <p:nvSpPr>
-          <p:cNvPr id="16" name="TextBox 15"/>
-          <p:cNvSpPr txBox="1"/>
-          <p:nvPr/>
-        </p:nvSpPr>
-        <p:spPr>
-          <a:xfrm>
-            <a:off x="3900830" y="3566160"/>
-            <a:ext cx="1773936" cy="1188720"/>
-          </a:xfrm>
-          <a:prstGeom prst="rect">
-            <a:avLst/>
-          </a:prstGeom>
-          <a:noFill/>
-        </p:spPr>
-        <p:txBody>
-          <a:bodyPr wrap="square">
-            <a:spAutoFit/>
-          </a:bodyPr>
-          <a:lstStyle/>
-          <a:p>
-            <a:pPr algn="l"/>
-            <a:r>
-              <a:rPr sz="1200" b="0">
-                <a:solidFill>
-                  <a:srgbClr val="222733"/>
-                </a:solidFill>
-                <a:latin typeface="맑은 고딕"/>
-              </a:rPr>
-              <a:t>VMware+VM 실행·로그인</a:t>
-            </a:r>
-          </a:p>
-        </p:txBody>
-      </p:sp>
-      <p:sp>
-        <p:nvSpPr>
-          <p:cNvPr id="17" name="Rectangle 16"/>
+          <p:cNvPr id="9" name="Isosceles Triangle 8"/>
           <p:cNvSpPr/>
           <p:nvPr/>
         </p:nvSpPr>
         <p:spPr>
-          <a:xfrm>
-            <a:off x="6016751" y="3273552"/>
-            <a:ext cx="128016" cy="219456"/>
-          </a:xfrm>
-          <a:prstGeom prst="rect">
+          <a:xfrm rot="5400000">
+            <a:off x="6021324" y="1673352"/>
+            <a:ext cx="146304" cy="146304"/>
+          </a:xfrm>
+          <a:prstGeom prst="triangle">
             <a:avLst/>
           </a:prstGeom>
           <a:solidFill>
@@ -7183,60 +6845,14 @@
       </p:sp>
       <p:sp>
         <p:nvSpPr>
-          <p:cNvPr id="18" name="Rectangle 17"/>
+          <p:cNvPr id="10" name="Rectangle 9"/>
           <p:cNvSpPr/>
           <p:nvPr/>
         </p:nvSpPr>
         <p:spPr>
           <a:xfrm>
-            <a:off x="6349593" y="1828800"/>
-            <a:ext cx="2048256" cy="3108960"/>
-          </a:xfrm>
-          <a:prstGeom prst="rect">
-            <a:avLst/>
-          </a:prstGeom>
-          <a:solidFill>
-            <a:srgbClr val="FFFFFF"/>
-          </a:solidFill>
-          <a:ln>
-            <a:solidFill>
-              <a:srgbClr val="FFFFFF"/>
-            </a:solidFill>
-          </a:ln>
-          <a:effectLst/>
-        </p:spPr>
-        <p:style>
-          <a:lnRef idx="1">
-            <a:schemeClr val="accent1"/>
-          </a:lnRef>
-          <a:fillRef idx="3">
-            <a:schemeClr val="accent1"/>
-          </a:fillRef>
-          <a:effectRef idx="2">
-            <a:schemeClr val="accent1"/>
-          </a:effectRef>
-          <a:fontRef idx="minor">
-            <a:schemeClr val="lt1"/>
-          </a:fontRef>
-        </p:style>
-        <p:txBody>
-          <a:bodyPr rtlCol="0" anchor="ctr"/>
-          <a:lstStyle/>
-          <a:p>
-            <a:pPr algn="ctr"/>
-          </a:p>
-        </p:txBody>
-      </p:sp>
-      <p:sp>
-        <p:nvSpPr>
-          <p:cNvPr id="19" name="Rectangle 18"/>
-          <p:cNvSpPr/>
-          <p:nvPr/>
-        </p:nvSpPr>
-        <p:spPr>
-          <a:xfrm>
-            <a:off x="6349593" y="1828800"/>
-            <a:ext cx="2048256" cy="109728"/>
+            <a:off x="7622438" y="1730959"/>
+            <a:ext cx="1995220" cy="31089"/>
           </a:xfrm>
           <a:prstGeom prst="rect">
             <a:avLst/>
@@ -7273,121 +6889,16 @@
       </p:sp>
       <p:sp>
         <p:nvSpPr>
-          <p:cNvPr id="20" name="TextBox 19"/>
-          <p:cNvSpPr txBox="1"/>
-          <p:nvPr/>
-        </p:nvSpPr>
-        <p:spPr>
-          <a:xfrm>
-            <a:off x="6486753" y="2148840"/>
-            <a:ext cx="1773936" cy="640080"/>
-          </a:xfrm>
-          <a:prstGeom prst="rect">
-            <a:avLst/>
-          </a:prstGeom>
-          <a:noFill/>
-        </p:spPr>
-        <p:txBody>
-          <a:bodyPr wrap="square">
-            <a:spAutoFit/>
-          </a:bodyPr>
-          <a:lstStyle/>
-          <a:p>
-            <a:pPr algn="l"/>
-            <a:r>
-              <a:rPr sz="1500" b="1">
-                <a:solidFill>
-                  <a:srgbClr val="14213D"/>
-                </a:solidFill>
-                <a:latin typeface="맑은 고딕"/>
-              </a:rPr>
-              <a:t>③ 환경 검증</a:t>
-            </a:r>
-          </a:p>
-        </p:txBody>
-      </p:sp>
-      <p:sp>
-        <p:nvSpPr>
-          <p:cNvPr id="21" name="TextBox 20"/>
-          <p:cNvSpPr txBox="1"/>
-          <p:nvPr/>
-        </p:nvSpPr>
-        <p:spPr>
-          <a:xfrm>
-            <a:off x="6486753" y="2834640"/>
-            <a:ext cx="1773936" cy="548640"/>
-          </a:xfrm>
-          <a:prstGeom prst="rect">
-            <a:avLst/>
-          </a:prstGeom>
-          <a:noFill/>
-        </p:spPr>
-        <p:txBody>
-          <a:bodyPr wrap="square">
-            <a:spAutoFit/>
-          </a:bodyPr>
-          <a:lstStyle/>
-          <a:p>
-            <a:pPr algn="l"/>
-            <a:r>
-              <a:rPr sz="1300" b="0">
-                <a:solidFill>
-                  <a:srgbClr val="0D9488"/>
-                </a:solidFill>
-                <a:latin typeface="맑은 고딕"/>
-              </a:rPr>
-              <a:t>15분</a:t>
-            </a:r>
-          </a:p>
-        </p:txBody>
-      </p:sp>
-      <p:sp>
-        <p:nvSpPr>
-          <p:cNvPr id="22" name="TextBox 21"/>
-          <p:cNvSpPr txBox="1"/>
-          <p:nvPr/>
-        </p:nvSpPr>
-        <p:spPr>
-          <a:xfrm>
-            <a:off x="6486753" y="3566160"/>
-            <a:ext cx="1773936" cy="1188720"/>
-          </a:xfrm>
-          <a:prstGeom prst="rect">
-            <a:avLst/>
-          </a:prstGeom>
-          <a:noFill/>
-        </p:spPr>
-        <p:txBody>
-          <a:bodyPr wrap="square">
-            <a:spAutoFit/>
-          </a:bodyPr>
-          <a:lstStyle/>
-          <a:p>
-            <a:pPr algn="l"/>
-            <a:r>
-              <a:rPr sz="1200" b="0">
-                <a:solidFill>
-                  <a:srgbClr val="222733"/>
-                </a:solidFill>
-                <a:latin typeface="맑은 고딕"/>
-              </a:rPr>
-              <a:t>환경 확인 + 학기 계정 안내</a:t>
-            </a:r>
-          </a:p>
-        </p:txBody>
-      </p:sp>
-      <p:sp>
-        <p:nvSpPr>
-          <p:cNvPr id="23" name="Rectangle 22"/>
+          <p:cNvPr id="11" name="Isosceles Triangle 10"/>
           <p:cNvSpPr/>
           <p:nvPr/>
         </p:nvSpPr>
         <p:spPr>
-          <a:xfrm>
-            <a:off x="8602675" y="3273552"/>
-            <a:ext cx="128016" cy="219456"/>
-          </a:xfrm>
-          <a:prstGeom prst="rect">
+          <a:xfrm rot="5400000">
+            <a:off x="8546896" y="1673352"/>
+            <a:ext cx="146304" cy="146304"/>
+          </a:xfrm>
+          <a:prstGeom prst="triangle">
             <a:avLst/>
           </a:prstGeom>
           <a:solidFill>
@@ -7422,25 +6933,23 @@
       </p:sp>
       <p:sp>
         <p:nvSpPr>
-          <p:cNvPr id="24" name="Rectangle 23"/>
+          <p:cNvPr id="12" name="Oval 11"/>
           <p:cNvSpPr/>
           <p:nvPr/>
         </p:nvSpPr>
         <p:spPr>
           <a:xfrm>
-            <a:off x="8935516" y="1828800"/>
-            <a:ext cx="2048256" cy="3108960"/>
-          </a:xfrm>
-          <a:prstGeom prst="rect">
+            <a:off x="2040940" y="1481328"/>
+            <a:ext cx="530352" cy="530352"/>
+          </a:xfrm>
+          <a:prstGeom prst="ellipse">
             <a:avLst/>
           </a:prstGeom>
           <a:solidFill>
-            <a:srgbClr val="FFFFFF"/>
+            <a:srgbClr val="0D9488"/>
           </a:solidFill>
           <a:ln>
-            <a:solidFill>
-              <a:srgbClr val="FFFFFF"/>
-            </a:solidFill>
+            <a:noFill/>
           </a:ln>
           <a:effectLst/>
         </p:spPr>
@@ -7468,20 +6977,177 @@
       </p:sp>
       <p:sp>
         <p:nvSpPr>
-          <p:cNvPr id="25" name="Rectangle 24"/>
+          <p:cNvPr id="13" name="TextBox 12"/>
+          <p:cNvSpPr txBox="1"/>
+          <p:nvPr/>
+        </p:nvSpPr>
+        <p:spPr>
+          <a:xfrm>
+            <a:off x="2040940" y="1481328"/>
+            <a:ext cx="530352" cy="530352"/>
+          </a:xfrm>
+          <a:prstGeom prst="rect">
+            <a:avLst/>
+          </a:prstGeom>
+          <a:noFill/>
+        </p:spPr>
+        <p:txBody>
+          <a:bodyPr wrap="square" anchor="ctr">
+            <a:spAutoFit/>
+          </a:bodyPr>
+          <a:lstStyle/>
+          <a:p>
+            <a:pPr algn="ctr"/>
+            <a:r>
+              <a:rPr sz="1600" b="1">
+                <a:solidFill>
+                  <a:srgbClr val="FFFFFF"/>
+                </a:solidFill>
+                <a:latin typeface="맑은 고딕"/>
+              </a:rPr>
+              <a:t>1</a:t>
+            </a:r>
+          </a:p>
+        </p:txBody>
+      </p:sp>
+      <p:sp>
+        <p:nvSpPr>
+          <p:cNvPr id="14" name="Rounded Rectangle 13"/>
           <p:cNvSpPr/>
           <p:nvPr/>
         </p:nvSpPr>
         <p:spPr>
           <a:xfrm>
-            <a:off x="8935516" y="1828800"/>
-            <a:ext cx="2048256" cy="109728"/>
-          </a:xfrm>
-          <a:prstGeom prst="rect">
-            <a:avLst/>
+            <a:off x="1263700" y="2304288"/>
+            <a:ext cx="2084831" cy="2880360"/>
+          </a:xfrm>
+          <a:prstGeom prst="roundRect">
+            <a:avLst>
+              <a:gd name="adj" fmla="val 6000"/>
+            </a:avLst>
           </a:prstGeom>
           <a:solidFill>
-            <a:srgbClr val="14B8A6"/>
+            <a:srgbClr val="FFFFFF"/>
+          </a:solidFill>
+          <a:ln w="12700">
+            <a:solidFill>
+              <a:srgbClr val="E3E7EE"/>
+            </a:solidFill>
+          </a:ln>
+          <a:effectLst/>
+        </p:spPr>
+        <p:style>
+          <a:lnRef idx="1">
+            <a:schemeClr val="accent1"/>
+          </a:lnRef>
+          <a:fillRef idx="3">
+            <a:schemeClr val="accent1"/>
+          </a:fillRef>
+          <a:effectRef idx="2">
+            <a:schemeClr val="accent1"/>
+          </a:effectRef>
+          <a:fontRef idx="minor">
+            <a:schemeClr val="lt1"/>
+          </a:fontRef>
+        </p:style>
+        <p:txBody>
+          <a:bodyPr rtlCol="0" anchor="ctr"/>
+          <a:lstStyle/>
+          <a:p>
+            <a:pPr algn="ctr"/>
+          </a:p>
+        </p:txBody>
+      </p:sp>
+      <p:sp>
+        <p:nvSpPr>
+          <p:cNvPr id="15" name="TextBox 14"/>
+          <p:cNvSpPr txBox="1"/>
+          <p:nvPr/>
+        </p:nvSpPr>
+        <p:spPr>
+          <a:xfrm>
+            <a:off x="1428292" y="2487168"/>
+            <a:ext cx="1755648" cy="548640"/>
+          </a:xfrm>
+          <a:prstGeom prst="rect">
+            <a:avLst/>
+          </a:prstGeom>
+          <a:noFill/>
+        </p:spPr>
+        <p:txBody>
+          <a:bodyPr wrap="square">
+            <a:spAutoFit/>
+          </a:bodyPr>
+          <a:lstStyle/>
+          <a:p>
+            <a:pPr algn="l"/>
+            <a:r>
+              <a:rPr sz="1500" b="1">
+                <a:solidFill>
+                  <a:srgbClr val="14213D"/>
+                </a:solidFill>
+                <a:latin typeface="맑은 고딕"/>
+              </a:rPr>
+              <a:t>배경 설명</a:t>
+            </a:r>
+          </a:p>
+        </p:txBody>
+      </p:sp>
+      <p:sp>
+        <p:nvSpPr>
+          <p:cNvPr id="16" name="TextBox 15"/>
+          <p:cNvSpPr txBox="1"/>
+          <p:nvPr/>
+        </p:nvSpPr>
+        <p:spPr>
+          <a:xfrm>
+            <a:off x="1428292" y="3081528"/>
+            <a:ext cx="1755648" cy="1965960"/>
+          </a:xfrm>
+          <a:prstGeom prst="rect">
+            <a:avLst/>
+          </a:prstGeom>
+          <a:noFill/>
+        </p:spPr>
+        <p:txBody>
+          <a:bodyPr wrap="square">
+            <a:spAutoFit/>
+          </a:bodyPr>
+          <a:lstStyle/>
+          <a:p>
+            <a:pPr algn="l">
+              <a:lnSpc>
+                <a:spcPct val="115000"/>
+              </a:lnSpc>
+            </a:pPr>
+            <a:r>
+              <a:rPr sz="1200" b="0">
+                <a:solidFill>
+                  <a:srgbClr val="222733"/>
+                </a:solidFill>
+                <a:latin typeface="맑은 고딕"/>
+              </a:rPr>
+              <a:t>왜 VM을 통째로 주는가</a:t>
+            </a:r>
+          </a:p>
+        </p:txBody>
+      </p:sp>
+      <p:sp>
+        <p:nvSpPr>
+          <p:cNvPr id="17" name="Oval 16"/>
+          <p:cNvSpPr/>
+          <p:nvPr/>
+        </p:nvSpPr>
+        <p:spPr>
+          <a:xfrm>
+            <a:off x="4566513" y="1481328"/>
+            <a:ext cx="530352" cy="530352"/>
+          </a:xfrm>
+          <a:prstGeom prst="ellipse">
+            <a:avLst/>
+          </a:prstGeom>
+          <a:solidFill>
+            <a:srgbClr val="0D9488"/>
           </a:solidFill>
           <a:ln>
             <a:noFill/>
@@ -7512,14 +7178,97 @@
       </p:sp>
       <p:sp>
         <p:nvSpPr>
-          <p:cNvPr id="26" name="TextBox 25"/>
+          <p:cNvPr id="18" name="TextBox 17"/>
           <p:cNvSpPr txBox="1"/>
           <p:nvPr/>
         </p:nvSpPr>
         <p:spPr>
           <a:xfrm>
-            <a:off x="9072676" y="2148840"/>
-            <a:ext cx="1773936" cy="640080"/>
+            <a:off x="4566513" y="1481328"/>
+            <a:ext cx="530352" cy="530352"/>
+          </a:xfrm>
+          <a:prstGeom prst="rect">
+            <a:avLst/>
+          </a:prstGeom>
+          <a:noFill/>
+        </p:spPr>
+        <p:txBody>
+          <a:bodyPr wrap="square" anchor="ctr">
+            <a:spAutoFit/>
+          </a:bodyPr>
+          <a:lstStyle/>
+          <a:p>
+            <a:pPr algn="ctr"/>
+            <a:r>
+              <a:rPr sz="1600" b="1">
+                <a:solidFill>
+                  <a:srgbClr val="FFFFFF"/>
+                </a:solidFill>
+                <a:latin typeface="맑은 고딕"/>
+              </a:rPr>
+              <a:t>2</a:t>
+            </a:r>
+          </a:p>
+        </p:txBody>
+      </p:sp>
+      <p:sp>
+        <p:nvSpPr>
+          <p:cNvPr id="19" name="Rounded Rectangle 18"/>
+          <p:cNvSpPr/>
+          <p:nvPr/>
+        </p:nvSpPr>
+        <p:spPr>
+          <a:xfrm>
+            <a:off x="3789273" y="2304288"/>
+            <a:ext cx="2084831" cy="2880360"/>
+          </a:xfrm>
+          <a:prstGeom prst="roundRect">
+            <a:avLst>
+              <a:gd name="adj" fmla="val 6000"/>
+            </a:avLst>
+          </a:prstGeom>
+          <a:solidFill>
+            <a:srgbClr val="FFFFFF"/>
+          </a:solidFill>
+          <a:ln w="12700">
+            <a:solidFill>
+              <a:srgbClr val="E3E7EE"/>
+            </a:solidFill>
+          </a:ln>
+          <a:effectLst/>
+        </p:spPr>
+        <p:style>
+          <a:lnRef idx="1">
+            <a:schemeClr val="accent1"/>
+          </a:lnRef>
+          <a:fillRef idx="3">
+            <a:schemeClr val="accent1"/>
+          </a:fillRef>
+          <a:effectRef idx="2">
+            <a:schemeClr val="accent1"/>
+          </a:effectRef>
+          <a:fontRef idx="minor">
+            <a:schemeClr val="lt1"/>
+          </a:fontRef>
+        </p:style>
+        <p:txBody>
+          <a:bodyPr rtlCol="0" anchor="ctr"/>
+          <a:lstStyle/>
+          <a:p>
+            <a:pPr algn="ctr"/>
+          </a:p>
+        </p:txBody>
+      </p:sp>
+      <p:sp>
+        <p:nvSpPr>
+          <p:cNvPr id="20" name="TextBox 19"/>
+          <p:cNvSpPr txBox="1"/>
+          <p:nvPr/>
+        </p:nvSpPr>
+        <p:spPr>
+          <a:xfrm>
+            <a:off x="3953865" y="2487168"/>
+            <a:ext cx="1755648" cy="548640"/>
           </a:xfrm>
           <a:prstGeom prst="rect">
             <a:avLst/>
@@ -7540,21 +7289,21 @@
                 </a:solidFill>
                 <a:latin typeface="맑은 고딕"/>
               </a:rPr>
-              <a:t>④ 질의응답</a:t>
-            </a:r>
-          </a:p>
-        </p:txBody>
-      </p:sp>
-      <p:sp>
-        <p:nvSpPr>
-          <p:cNvPr id="27" name="TextBox 26"/>
+              <a:t>설치 실습</a:t>
+            </a:r>
+          </a:p>
+        </p:txBody>
+      </p:sp>
+      <p:sp>
+        <p:nvSpPr>
+          <p:cNvPr id="21" name="TextBox 20"/>
           <p:cNvSpPr txBox="1"/>
           <p:nvPr/>
         </p:nvSpPr>
         <p:spPr>
           <a:xfrm>
-            <a:off x="9072676" y="2834640"/>
-            <a:ext cx="1773936" cy="548640"/>
+            <a:off x="3953865" y="3081528"/>
+            <a:ext cx="1755648" cy="1965960"/>
           </a:xfrm>
           <a:prstGeom prst="rect">
             <a:avLst/>
@@ -7567,29 +7316,160 @@
           </a:bodyPr>
           <a:lstStyle/>
           <a:p>
-            <a:pPr algn="l"/>
-            <a:r>
-              <a:rPr sz="1300" b="0">
-                <a:solidFill>
-                  <a:srgbClr val="0D9488"/>
-                </a:solidFill>
-                <a:latin typeface="맑은 고딕"/>
-              </a:rPr>
-              <a:t>10분</a:t>
-            </a:r>
-          </a:p>
-        </p:txBody>
-      </p:sp>
-      <p:sp>
-        <p:nvSpPr>
-          <p:cNvPr id="28" name="TextBox 27"/>
+            <a:pPr algn="l">
+              <a:lnSpc>
+                <a:spcPct val="115000"/>
+              </a:lnSpc>
+            </a:pPr>
+            <a:r>
+              <a:rPr sz="1200" b="0">
+                <a:solidFill>
+                  <a:srgbClr val="222733"/>
+                </a:solidFill>
+                <a:latin typeface="맑은 고딕"/>
+              </a:rPr>
+              <a:t>VMware+VM 실행·로그인</a:t>
+            </a:r>
+          </a:p>
+        </p:txBody>
+      </p:sp>
+      <p:sp>
+        <p:nvSpPr>
+          <p:cNvPr id="22" name="Oval 21"/>
+          <p:cNvSpPr/>
+          <p:nvPr/>
+        </p:nvSpPr>
+        <p:spPr>
+          <a:xfrm>
+            <a:off x="7092086" y="1481328"/>
+            <a:ext cx="530352" cy="530352"/>
+          </a:xfrm>
+          <a:prstGeom prst="ellipse">
+            <a:avLst/>
+          </a:prstGeom>
+          <a:solidFill>
+            <a:srgbClr val="0D9488"/>
+          </a:solidFill>
+          <a:ln>
+            <a:noFill/>
+          </a:ln>
+          <a:effectLst/>
+        </p:spPr>
+        <p:style>
+          <a:lnRef idx="1">
+            <a:schemeClr val="accent1"/>
+          </a:lnRef>
+          <a:fillRef idx="3">
+            <a:schemeClr val="accent1"/>
+          </a:fillRef>
+          <a:effectRef idx="2">
+            <a:schemeClr val="accent1"/>
+          </a:effectRef>
+          <a:fontRef idx="minor">
+            <a:schemeClr val="lt1"/>
+          </a:fontRef>
+        </p:style>
+        <p:txBody>
+          <a:bodyPr rtlCol="0" anchor="ctr"/>
+          <a:lstStyle/>
+          <a:p>
+            <a:pPr algn="ctr"/>
+          </a:p>
+        </p:txBody>
+      </p:sp>
+      <p:sp>
+        <p:nvSpPr>
+          <p:cNvPr id="23" name="TextBox 22"/>
           <p:cNvSpPr txBox="1"/>
           <p:nvPr/>
         </p:nvSpPr>
         <p:spPr>
           <a:xfrm>
-            <a:off x="9072676" y="3566160"/>
-            <a:ext cx="1773936" cy="1188720"/>
+            <a:off x="7092086" y="1481328"/>
+            <a:ext cx="530352" cy="530352"/>
+          </a:xfrm>
+          <a:prstGeom prst="rect">
+            <a:avLst/>
+          </a:prstGeom>
+          <a:noFill/>
+        </p:spPr>
+        <p:txBody>
+          <a:bodyPr wrap="square" anchor="ctr">
+            <a:spAutoFit/>
+          </a:bodyPr>
+          <a:lstStyle/>
+          <a:p>
+            <a:pPr algn="ctr"/>
+            <a:r>
+              <a:rPr sz="1600" b="1">
+                <a:solidFill>
+                  <a:srgbClr val="FFFFFF"/>
+                </a:solidFill>
+                <a:latin typeface="맑은 고딕"/>
+              </a:rPr>
+              <a:t>3</a:t>
+            </a:r>
+          </a:p>
+        </p:txBody>
+      </p:sp>
+      <p:sp>
+        <p:nvSpPr>
+          <p:cNvPr id="24" name="Rounded Rectangle 23"/>
+          <p:cNvSpPr/>
+          <p:nvPr/>
+        </p:nvSpPr>
+        <p:spPr>
+          <a:xfrm>
+            <a:off x="6314846" y="2304288"/>
+            <a:ext cx="2084831" cy="2880360"/>
+          </a:xfrm>
+          <a:prstGeom prst="roundRect">
+            <a:avLst>
+              <a:gd name="adj" fmla="val 6000"/>
+            </a:avLst>
+          </a:prstGeom>
+          <a:solidFill>
+            <a:srgbClr val="FFFFFF"/>
+          </a:solidFill>
+          <a:ln w="12700">
+            <a:solidFill>
+              <a:srgbClr val="E3E7EE"/>
+            </a:solidFill>
+          </a:ln>
+          <a:effectLst/>
+        </p:spPr>
+        <p:style>
+          <a:lnRef idx="1">
+            <a:schemeClr val="accent1"/>
+          </a:lnRef>
+          <a:fillRef idx="3">
+            <a:schemeClr val="accent1"/>
+          </a:fillRef>
+          <a:effectRef idx="2">
+            <a:schemeClr val="accent1"/>
+          </a:effectRef>
+          <a:fontRef idx="minor">
+            <a:schemeClr val="lt1"/>
+          </a:fontRef>
+        </p:style>
+        <p:txBody>
+          <a:bodyPr rtlCol="0" anchor="ctr"/>
+          <a:lstStyle/>
+          <a:p>
+            <a:pPr algn="ctr"/>
+          </a:p>
+        </p:txBody>
+      </p:sp>
+      <p:sp>
+        <p:nvSpPr>
+          <p:cNvPr id="25" name="TextBox 24"/>
+          <p:cNvSpPr txBox="1"/>
+          <p:nvPr/>
+        </p:nvSpPr>
+        <p:spPr>
+          <a:xfrm>
+            <a:off x="6479438" y="2487168"/>
+            <a:ext cx="1755648" cy="548640"/>
           </a:xfrm>
           <a:prstGeom prst="rect">
             <a:avLst/>
@@ -7604,27 +7484,27 @@
           <a:p>
             <a:pPr algn="l"/>
             <a:r>
-              <a:rPr sz="1200" b="0">
-                <a:solidFill>
-                  <a:srgbClr val="222733"/>
-                </a:solidFill>
-                <a:latin typeface="맑은 고딕"/>
-              </a:rPr>
-              <a:t>트러블슈팅 안내</a:t>
-            </a:r>
-          </a:p>
-        </p:txBody>
-      </p:sp>
-      <p:sp>
-        <p:nvSpPr>
-          <p:cNvPr id="29" name="TextBox 28"/>
+              <a:rPr sz="1500" b="1">
+                <a:solidFill>
+                  <a:srgbClr val="14213D"/>
+                </a:solidFill>
+                <a:latin typeface="맑은 고딕"/>
+              </a:rPr>
+              <a:t>환경 검증</a:t>
+            </a:r>
+          </a:p>
+        </p:txBody>
+      </p:sp>
+      <p:sp>
+        <p:nvSpPr>
+          <p:cNvPr id="26" name="TextBox 25"/>
           <p:cNvSpPr txBox="1"/>
           <p:nvPr/>
         </p:nvSpPr>
         <p:spPr>
           <a:xfrm>
-            <a:off x="457200" y="6528816"/>
-            <a:ext cx="7315200" cy="274320"/>
+            <a:off x="6479438" y="3081528"/>
+            <a:ext cx="1755648" cy="1965960"/>
           </a:xfrm>
           <a:prstGeom prst="rect">
             <a:avLst/>
@@ -7637,16 +7517,147 @@
           </a:bodyPr>
           <a:lstStyle/>
           <a:p>
-            <a:pPr algn="l"/>
-            <a:r>
-              <a:rPr sz="900" b="0">
-                <a:solidFill>
-                  <a:srgbClr val="5B6373"/>
-                </a:solidFill>
-                <a:latin typeface="맑은 고딕"/>
-              </a:rPr>
-              <a:t>클라우드인프라관리  ·  0주차 오리엔테이션</a:t>
-            </a:r>
+            <a:pPr algn="l">
+              <a:lnSpc>
+                <a:spcPct val="115000"/>
+              </a:lnSpc>
+            </a:pPr>
+            <a:r>
+              <a:rPr sz="1200" b="0">
+                <a:solidFill>
+                  <a:srgbClr val="222733"/>
+                </a:solidFill>
+                <a:latin typeface="맑은 고딕"/>
+              </a:rPr>
+              <a:t>환경 확인 + 학기 계정 안내</a:t>
+            </a:r>
+          </a:p>
+        </p:txBody>
+      </p:sp>
+      <p:sp>
+        <p:nvSpPr>
+          <p:cNvPr id="27" name="Oval 26"/>
+          <p:cNvSpPr/>
+          <p:nvPr/>
+        </p:nvSpPr>
+        <p:spPr>
+          <a:xfrm>
+            <a:off x="9617659" y="1481328"/>
+            <a:ext cx="530352" cy="530352"/>
+          </a:xfrm>
+          <a:prstGeom prst="ellipse">
+            <a:avLst/>
+          </a:prstGeom>
+          <a:solidFill>
+            <a:srgbClr val="0D9488"/>
+          </a:solidFill>
+          <a:ln>
+            <a:noFill/>
+          </a:ln>
+          <a:effectLst/>
+        </p:spPr>
+        <p:style>
+          <a:lnRef idx="1">
+            <a:schemeClr val="accent1"/>
+          </a:lnRef>
+          <a:fillRef idx="3">
+            <a:schemeClr val="accent1"/>
+          </a:fillRef>
+          <a:effectRef idx="2">
+            <a:schemeClr val="accent1"/>
+          </a:effectRef>
+          <a:fontRef idx="minor">
+            <a:schemeClr val="lt1"/>
+          </a:fontRef>
+        </p:style>
+        <p:txBody>
+          <a:bodyPr rtlCol="0" anchor="ctr"/>
+          <a:lstStyle/>
+          <a:p>
+            <a:pPr algn="ctr"/>
+          </a:p>
+        </p:txBody>
+      </p:sp>
+      <p:sp>
+        <p:nvSpPr>
+          <p:cNvPr id="28" name="TextBox 27"/>
+          <p:cNvSpPr txBox="1"/>
+          <p:nvPr/>
+        </p:nvSpPr>
+        <p:spPr>
+          <a:xfrm>
+            <a:off x="9617659" y="1481328"/>
+            <a:ext cx="530352" cy="530352"/>
+          </a:xfrm>
+          <a:prstGeom prst="rect">
+            <a:avLst/>
+          </a:prstGeom>
+          <a:noFill/>
+        </p:spPr>
+        <p:txBody>
+          <a:bodyPr wrap="square" anchor="ctr">
+            <a:spAutoFit/>
+          </a:bodyPr>
+          <a:lstStyle/>
+          <a:p>
+            <a:pPr algn="ctr"/>
+            <a:r>
+              <a:rPr sz="1600" b="1">
+                <a:solidFill>
+                  <a:srgbClr val="FFFFFF"/>
+                </a:solidFill>
+                <a:latin typeface="맑은 고딕"/>
+              </a:rPr>
+              <a:t>4</a:t>
+            </a:r>
+          </a:p>
+        </p:txBody>
+      </p:sp>
+      <p:sp>
+        <p:nvSpPr>
+          <p:cNvPr id="29" name="Rounded Rectangle 28"/>
+          <p:cNvSpPr/>
+          <p:nvPr/>
+        </p:nvSpPr>
+        <p:spPr>
+          <a:xfrm>
+            <a:off x="8840419" y="2304288"/>
+            <a:ext cx="2084831" cy="2880360"/>
+          </a:xfrm>
+          <a:prstGeom prst="roundRect">
+            <a:avLst>
+              <a:gd name="adj" fmla="val 6000"/>
+            </a:avLst>
+          </a:prstGeom>
+          <a:solidFill>
+            <a:srgbClr val="FFFFFF"/>
+          </a:solidFill>
+          <a:ln w="12700">
+            <a:solidFill>
+              <a:srgbClr val="E3E7EE"/>
+            </a:solidFill>
+          </a:ln>
+          <a:effectLst/>
+        </p:spPr>
+        <p:style>
+          <a:lnRef idx="1">
+            <a:schemeClr val="accent1"/>
+          </a:lnRef>
+          <a:fillRef idx="3">
+            <a:schemeClr val="accent1"/>
+          </a:fillRef>
+          <a:effectRef idx="2">
+            <a:schemeClr val="accent1"/>
+          </a:effectRef>
+          <a:fontRef idx="minor">
+            <a:schemeClr val="lt1"/>
+          </a:fontRef>
+        </p:style>
+        <p:txBody>
+          <a:bodyPr rtlCol="0" anchor="ctr"/>
+          <a:lstStyle/>
+          <a:p>
+            <a:pPr algn="ctr"/>
           </a:p>
         </p:txBody>
       </p:sp>
@@ -7658,8 +7669,8 @@
         </p:nvSpPr>
         <p:spPr>
           <a:xfrm>
-            <a:off x="10607040" y="6528816"/>
-            <a:ext cx="1188720" cy="274320"/>
+            <a:off x="9005011" y="2487168"/>
+            <a:ext cx="1755648" cy="548640"/>
           </a:xfrm>
           <a:prstGeom prst="rect">
             <a:avLst/>
@@ -7674,12 +7685,121 @@
           <a:p>
             <a:pPr algn="l"/>
             <a:r>
+              <a:rPr sz="1500" b="1">
+                <a:solidFill>
+                  <a:srgbClr val="14213D"/>
+                </a:solidFill>
+                <a:latin typeface="맑은 고딕"/>
+              </a:rPr>
+              <a:t>질의응답</a:t>
+            </a:r>
+          </a:p>
+        </p:txBody>
+      </p:sp>
+      <p:sp>
+        <p:nvSpPr>
+          <p:cNvPr id="31" name="TextBox 30"/>
+          <p:cNvSpPr txBox="1"/>
+          <p:nvPr/>
+        </p:nvSpPr>
+        <p:spPr>
+          <a:xfrm>
+            <a:off x="9005011" y="3081528"/>
+            <a:ext cx="1755648" cy="1965960"/>
+          </a:xfrm>
+          <a:prstGeom prst="rect">
+            <a:avLst/>
+          </a:prstGeom>
+          <a:noFill/>
+        </p:spPr>
+        <p:txBody>
+          <a:bodyPr wrap="square">
+            <a:spAutoFit/>
+          </a:bodyPr>
+          <a:lstStyle/>
+          <a:p>
+            <a:pPr algn="l">
+              <a:lnSpc>
+                <a:spcPct val="115000"/>
+              </a:lnSpc>
+            </a:pPr>
+            <a:r>
+              <a:rPr sz="1200" b="0">
+                <a:solidFill>
+                  <a:srgbClr val="222733"/>
+                </a:solidFill>
+                <a:latin typeface="맑은 고딕"/>
+              </a:rPr>
+              <a:t>트러블슈팅 안내</a:t>
+            </a:r>
+          </a:p>
+        </p:txBody>
+      </p:sp>
+      <p:sp>
+        <p:nvSpPr>
+          <p:cNvPr id="32" name="TextBox 31"/>
+          <p:cNvSpPr txBox="1"/>
+          <p:nvPr/>
+        </p:nvSpPr>
+        <p:spPr>
+          <a:xfrm>
+            <a:off x="457200" y="6528816"/>
+            <a:ext cx="7315200" cy="274320"/>
+          </a:xfrm>
+          <a:prstGeom prst="rect">
+            <a:avLst/>
+          </a:prstGeom>
+          <a:noFill/>
+        </p:spPr>
+        <p:txBody>
+          <a:bodyPr wrap="square">
+            <a:spAutoFit/>
+          </a:bodyPr>
+          <a:lstStyle/>
+          <a:p>
+            <a:pPr algn="l"/>
+            <a:r>
               <a:rPr sz="900" b="0">
                 <a:solidFill>
                   <a:srgbClr val="5B6373"/>
                 </a:solidFill>
                 <a:latin typeface="맑은 고딕"/>
               </a:rPr>
+              <a:t>클라우드인프라관리  ·  0주차 오리엔테이션</a:t>
+            </a:r>
+          </a:p>
+        </p:txBody>
+      </p:sp>
+      <p:sp>
+        <p:nvSpPr>
+          <p:cNvPr id="33" name="TextBox 32"/>
+          <p:cNvSpPr txBox="1"/>
+          <p:nvPr/>
+        </p:nvSpPr>
+        <p:spPr>
+          <a:xfrm>
+            <a:off x="10607040" y="6528816"/>
+            <a:ext cx="1188720" cy="274320"/>
+          </a:xfrm>
+          <a:prstGeom prst="rect">
+            <a:avLst/>
+          </a:prstGeom>
+          <a:noFill/>
+        </p:spPr>
+        <p:txBody>
+          <a:bodyPr wrap="square">
+            <a:spAutoFit/>
+          </a:bodyPr>
+          <a:lstStyle/>
+          <a:p>
+            <a:pPr algn="l"/>
+            <a:r>
+              <a:rPr sz="900" b="0">
+                <a:solidFill>
+                  <a:srgbClr val="5B6373"/>
+                </a:solidFill>
+                <a:latin typeface="맑은 고딕"/>
+              </a:rPr>
               <a:t>03 / 16</a:t>
             </a:r>
           </a:p>
@@ -7687,7 +7807,7 @@
       </p:sp>
       <p:sp>
         <p:nvSpPr>
-          <p:cNvPr id="31" name="Rectangle 30"/>
+          <p:cNvPr id="34" name="Rectangle 33"/>
           <p:cNvSpPr/>
           <p:nvPr/>
         </p:nvSpPr>
@@ -10573,15 +10693,6 @@
               </a:lnSpc>
             </a:pPr>
             <a:r>
-              <a:rPr sz="1500" b="1">
-                <a:solidFill>
-                  <a:srgbClr val="0D9488"/>
-                </a:solidFill>
-                <a:latin typeface="맑은 고딕"/>
-              </a:rPr>
-              <a:t>●  </a:t>
-            </a:r>
-            <a:r>
               <a:rPr sz="1500" b="0">
                 <a:solidFill>
                   <a:srgbClr val="222733"/>
@@ -10598,15 +10709,6 @@
               </a:lnSpc>
             </a:pPr>
             <a:r>
-              <a:rPr sz="1500" b="1">
-                <a:solidFill>
-                  <a:srgbClr val="0D9488"/>
-                </a:solidFill>
-                <a:latin typeface="맑은 고딕"/>
-              </a:rPr>
-              <a:t>●  </a:t>
-            </a:r>
-            <a:r>
               <a:rPr sz="1500" b="0">
                 <a:solidFill>
                   <a:srgbClr val="222733"/>
@@ -10623,15 +10725,6 @@
               </a:lnSpc>
             </a:pPr>
             <a:r>
-              <a:rPr sz="1500" b="1">
-                <a:solidFill>
-                  <a:srgbClr val="0D9488"/>
-                </a:solidFill>
-                <a:latin typeface="맑은 고딕"/>
-              </a:rPr>
-              <a:t>●  </a:t>
-            </a:r>
-            <a:r>
               <a:rPr sz="1500" b="0">
                 <a:solidFill>
                   <a:srgbClr val="222733"/>
@@ -10648,15 +10741,6 @@
               </a:lnSpc>
             </a:pPr>
             <a:r>
-              <a:rPr sz="1500" b="1">
-                <a:solidFill>
-                  <a:srgbClr val="0D9488"/>
-                </a:solidFill>
-                <a:latin typeface="맑은 고딕"/>
-              </a:rPr>
-              <a:t>●  </a:t>
-            </a:r>
-            <a:r>
               <a:rPr sz="1500" b="0">
                 <a:solidFill>
                   <a:srgbClr val="222733"/>
@@ -10672,15 +10756,6 @@
                 <a:spcPct val="115000"/>
               </a:lnSpc>
             </a:pPr>
-            <a:r>
-              <a:rPr sz="1500" b="1">
-                <a:solidFill>
-                  <a:srgbClr val="0D9488"/>
-                </a:solidFill>
-                <a:latin typeface="맑은 고딕"/>
-              </a:rPr>
-              <a:t>●  </a:t>
-            </a:r>
             <a:r>
               <a:rPr sz="1500" b="0">
                 <a:solidFill>
